--- a/presentations/01_Вчення_Вернадського_ноосфера.pptx
+++ b/presentations/01_Вчення_Вернадського_ноосфера.pptx
@@ -136,7 +136,7 @@
   <p:extLst>
     <p:ext uri="{521415D9-36F7-43E2-AB2F-B90AF26B5E84}">
       <p14:sectionLst xmlns:p14="http://schemas.microsoft.com/office/powerpoint/2010/main">
-        <p14:section name="Вступ" id="{56fd43c2-867b-16db-2aa2-26b69f64166d}">
+        <p14:section name="Вступ" id="{535cb631-f66e-2a21-cc53-202dedd7c06d}">
           <p14:sldIdLst>
             <p14:sldId id="256"/>
             <p14:sldId id="257"/>
@@ -144,7 +144,7 @@
             <p14:sldId id="259"/>
           </p14:sldIdLst>
         </p14:section>
-        <p14:section name="Вернадський і ноосфера" id="{a2e1907f-4e73-c029-b1c9-51736382bf7e}">
+        <p14:section name="Вернадський і ноосфера" id="{2887a6c5-b367-6b3a-03cb-71eb0647599c}">
           <p14:sldIdLst>
             <p14:sldId id="260"/>
             <p14:sldId id="261"/>
@@ -152,7 +152,7 @@
             <p14:sldId id="263"/>
           </p14:sldIdLst>
         </p14:section>
-        <p14:section name="Основні положення вчення" id="{e9566895-536b-d97d-c728-60c0571976f8}">
+        <p14:section name="Основні положення вчення" id="{d0e40c2c-5778-54ac-aad4-4fc5759d4a70}">
           <p14:sldIdLst>
             <p14:sldId id="264"/>
             <p14:sldId id="265"/>
@@ -161,7 +161,7 @@
             <p14:sldId id="268"/>
           </p14:sldIdLst>
         </p14:section>
-        <p14:section name="Екологічна криза і ноосфера" id="{b49cb547-5267-1612-197c-0d1a1d152808}">
+        <p14:section name="Екологічна криза і ноосфера" id="{29210705-db10-4bdb-8364-589a554f305b}">
           <p14:sldIdLst>
             <p14:sldId id="269"/>
             <p14:sldId id="270"/>
@@ -170,7 +170,7 @@
             <p14:sldId id="273"/>
           </p14:sldIdLst>
         </p14:section>
-        <p14:section name="Міфи і факти" id="{4794c305-2c13-fa17-109a-5ab910970579}">
+        <p14:section name="Міфи і факти" id="{9f531931-7939-2bed-77eb-44806c278c95}">
           <p14:sldIdLst>
             <p14:sldId id="274"/>
             <p14:sldId id="275"/>
@@ -180,7 +180,7 @@
             <p14:sldId id="279"/>
           </p14:sldIdLst>
         </p14:section>
-        <p14:section name="Закріплення" id="{7b5c8f71-96f7-391a-385e-38c6f40ddcd4}">
+        <p14:section name="Закріплення" id="{c299b605-5866-5cb2-334f-10f06265b635}">
           <p14:sldIdLst>
             <p14:sldId id="280"/>
             <p14:sldId id="281"/>
@@ -5096,7 +5096,7 @@
               <a:buNone/>
             </a:pPr>
             <a:r>
-              <a:rPr lang="en-US" sz="5400" b="1" dirty="0">
+              <a:rPr lang="en-US" sz="3400" b="1" dirty="0">
                 <a:solidFill>
                   <a:srgbClr val="457B9D"/>
                 </a:solidFill>
@@ -5106,7 +5106,7 @@
               </a:rPr>
               <a:t>≈ 4,7·10²¹</a:t>
             </a:r>
-            <a:endParaRPr lang="en-US" sz="5400" dirty="0"/>
+            <a:endParaRPr lang="en-US" sz="3400" dirty="0"/>
           </a:p>
         </p:txBody>
       </p:sp>
@@ -5200,7 +5200,7 @@
               <a:buNone/>
             </a:pPr>
             <a:r>
-              <a:rPr lang="en-US" sz="5400" b="1" dirty="0">
+              <a:rPr lang="en-US" sz="3400" b="1" dirty="0">
                 <a:solidFill>
                   <a:srgbClr val="E76F51"/>
                 </a:solidFill>
@@ -5210,7 +5210,7 @@
               </a:rPr>
               <a:t>≈ 4 700 т</a:t>
             </a:r>
-            <a:endParaRPr lang="en-US" sz="5400" dirty="0"/>
+            <a:endParaRPr lang="en-US" sz="3400" dirty="0"/>
           </a:p>
         </p:txBody>
       </p:sp>
